--- a/Apresentações/09 - Funçoes e Pacotes.pptx
+++ b/Apresentações/09 - Funçoes e Pacotes.pptx
@@ -1447,6 +1447,67 @@
     <p:extLst>
       <p:ext uri="{BB962C8B-B14F-4D97-AF65-F5344CB8AC3E}">
         <p14:creationId xmlns:p14="http://schemas.microsoft.com/office/powerpoint/2010/main" val="4214185272"/>
+      </p:ext>
+    </p:extLst>
+  </p:cSld>
+  <p:clrMapOvr>
+    <a:masterClrMapping/>
+  </p:clrMapOvr>
+</p:notes>
+</file>
+
+<file path=ppt/notesSlides/notesSlide14.xml><?xml version="1.0" encoding="utf-8"?>
+<p:notes xmlns:a="http://schemas.openxmlformats.org/drawingml/2006/main" xmlns:r="http://schemas.openxmlformats.org/officeDocument/2006/relationships" xmlns:p="http://schemas.openxmlformats.org/presentationml/2006/main">
+  <p:cSld>
+    <p:spTree>
+      <p:nvGrpSpPr>
+        <p:cNvPr id="1" name=""/>
+        <p:cNvGrpSpPr/>
+        <p:nvPr/>
+      </p:nvGrpSpPr>
+      <p:grpSpPr>
+        <a:xfrm>
+          <a:off x="0" y="0"/>
+          <a:ext cx="0" cy="0"/>
+          <a:chOff x="0" y="0"/>
+          <a:chExt cx="0" cy="0"/>
+        </a:xfrm>
+      </p:grpSpPr>
+      <p:sp>
+        <p:nvSpPr>
+          <p:cNvPr id="2" name="Espaço Reservado para Imagem de Slide 1"/>
+          <p:cNvSpPr>
+            <a:spLocks noGrp="1" noRot="1" noChangeAspect="1"/>
+          </p:cNvSpPr>
+          <p:nvPr>
+            <p:ph type="sldImg"/>
+          </p:nvPr>
+        </p:nvSpPr>
+        <p:spPr/>
+      </p:sp>
+      <p:sp>
+        <p:nvSpPr>
+          <p:cNvPr id="3" name="Espaço Reservado para Anotações 2"/>
+          <p:cNvSpPr>
+            <a:spLocks noGrp="1"/>
+          </p:cNvSpPr>
+          <p:nvPr>
+            <p:ph type="body" idx="1"/>
+          </p:nvPr>
+        </p:nvSpPr>
+        <p:spPr/>
+        <p:txBody>
+          <a:bodyPr/>
+          <a:lstStyle/>
+          <a:p>
+            <a:endParaRPr lang="pt-BR"/>
+          </a:p>
+        </p:txBody>
+      </p:sp>
+    </p:spTree>
+    <p:extLst>
+      <p:ext uri="{BB962C8B-B14F-4D97-AF65-F5344CB8AC3E}">
+        <p14:creationId xmlns:p14="http://schemas.microsoft.com/office/powerpoint/2010/main" val="2033579890"/>
       </p:ext>
     </p:extLst>
   </p:cSld>
@@ -20459,8 +20520,8 @@
         </p:nvSpPr>
         <p:spPr bwMode="auto">
           <a:xfrm>
-            <a:off x="-36512" y="987574"/>
-            <a:ext cx="9144000" cy="3672408"/>
+            <a:off x="971600" y="987574"/>
+            <a:ext cx="7488832" cy="3672408"/>
           </a:xfrm>
           <a:prstGeom prst="rect">
             <a:avLst/>
@@ -20968,8 +21029,8 @@
         </p:nvSpPr>
         <p:spPr bwMode="auto">
           <a:xfrm>
-            <a:off x="-36512" y="987574"/>
-            <a:ext cx="9144000" cy="3672408"/>
+            <a:off x="971600" y="987574"/>
+            <a:ext cx="7560840" cy="3672408"/>
           </a:xfrm>
           <a:prstGeom prst="rect">
             <a:avLst/>
@@ -21391,8 +21452,8 @@
         </p:nvSpPr>
         <p:spPr bwMode="auto">
           <a:xfrm>
-            <a:off x="-36512" y="987574"/>
-            <a:ext cx="9144000" cy="3672408"/>
+            <a:off x="899592" y="987574"/>
+            <a:ext cx="7776864" cy="3672408"/>
           </a:xfrm>
           <a:prstGeom prst="rect">
             <a:avLst/>
@@ -22150,7 +22211,7 @@
         </p:nvSpPr>
         <p:spPr>
           <a:xfrm>
-            <a:off x="685800" y="1991824"/>
+            <a:off x="899592" y="1131590"/>
             <a:ext cx="7774632" cy="2236109"/>
           </a:xfrm>
         </p:spPr>
@@ -24083,8 +24144,8 @@
         </p:nvSpPr>
         <p:spPr bwMode="auto">
           <a:xfrm>
-            <a:off x="312238" y="618705"/>
-            <a:ext cx="8657706" cy="3931547"/>
+            <a:off x="539552" y="666278"/>
+            <a:ext cx="8430392" cy="3883974"/>
           </a:xfrm>
           <a:prstGeom prst="rect">
             <a:avLst/>
@@ -24214,21 +24275,25 @@
             </a:lvl9pPr>
           </a:lstStyle>
           <a:p>
+            <a:pPr algn="just"/>
             <a:r>
               <a:rPr lang="pt-BR" sz="2000" dirty="0"/>
               <a:t>Um subprograma são pequenas rotinas que podem ser invocados por meio de um identificador e de uma lista de parâmetros de entrada</a:t>
             </a:r>
           </a:p>
           <a:p>
+            <a:pPr algn="just"/>
             <a:endParaRPr lang="pt-BR" sz="1100" dirty="0"/>
           </a:p>
           <a:p>
+            <a:pPr algn="just"/>
             <a:r>
               <a:rPr lang="pt-BR" sz="1800" dirty="0"/>
               <a:t>Em Python, subprogramas têm o nome de funções</a:t>
             </a:r>
           </a:p>
           <a:p>
+            <a:pPr algn="just"/>
             <a:r>
               <a:rPr lang="pt-BR" sz="1800" b="1" dirty="0"/>
               <a:t>Sintaxe</a:t>
@@ -24239,6 +24304,7 @@
             </a:r>
           </a:p>
           <a:p>
+            <a:pPr algn="just"/>
             <a:r>
               <a:rPr lang="da-DK" sz="1800" dirty="0"/>
               <a:t> </a:t>
@@ -24277,18 +24343,21 @@
             </a:r>
           </a:p>
           <a:p>
+            <a:pPr algn="just"/>
             <a:r>
               <a:rPr lang="pt-BR" sz="1800" dirty="0"/>
               <a:t>       comando1</a:t>
             </a:r>
           </a:p>
           <a:p>
+            <a:pPr algn="just"/>
             <a:r>
               <a:rPr lang="pt-BR" sz="1800" dirty="0"/>
               <a:t>       comando2</a:t>
             </a:r>
           </a:p>
           <a:p>
+            <a:pPr algn="just"/>
             <a:r>
               <a:rPr lang="pt-BR" sz="1800" dirty="0"/>
               <a:t>       </a:t>
@@ -24307,6 +24376,7 @@
             </a:r>
           </a:p>
           <a:p>
+            <a:pPr algn="just"/>
             <a:r>
               <a:rPr lang="pt-BR" sz="1600" b="1" dirty="0"/>
               <a:t>Onde</a:t>
@@ -24317,7 +24387,7 @@
             </a:r>
           </a:p>
           <a:p>
-            <a:pPr marL="342900" indent="-342900">
+            <a:pPr marL="342900" indent="-342900" algn="just">
               <a:buFont typeface="Arial" panose="020B0604020202020204" pitchFamily="34" charset="0"/>
               <a:buChar char="•"/>
             </a:pPr>
@@ -24335,7 +24405,7 @@
             </a:r>
           </a:p>
           <a:p>
-            <a:pPr marL="342900" indent="-342900">
+            <a:pPr marL="342900" indent="-342900" algn="just">
               <a:buFont typeface="Arial" panose="020B0604020202020204" pitchFamily="34" charset="0"/>
               <a:buChar char="•"/>
             </a:pPr>
@@ -24353,7 +24423,7 @@
             </a:r>
           </a:p>
           <a:p>
-            <a:pPr marL="342900" indent="-342900">
+            <a:pPr marL="342900" indent="-342900" algn="just">
               <a:buFont typeface="Arial" panose="020B0604020202020204" pitchFamily="34" charset="0"/>
               <a:buChar char="•"/>
             </a:pPr>
@@ -24363,7 +24433,7 @@
             </a:r>
           </a:p>
           <a:p>
-            <a:pPr marL="342900" indent="-342900">
+            <a:pPr marL="342900" indent="-342900" algn="just">
               <a:buFont typeface="Arial" panose="020B0604020202020204" pitchFamily="34" charset="0"/>
               <a:buChar char="•"/>
             </a:pPr>
@@ -24874,6 +24944,9 @@
                     <p:cTn id="3" fill="hold">
                       <p:stCondLst>
                         <p:cond delay="indefinite"/>
+                        <p:cond evt="onBegin" delay="0">
+                          <p:tn val="2"/>
+                        </p:cond>
                       </p:stCondLst>
                       <p:childTnLst>
                         <p:par>
@@ -24883,7 +24956,7 @@
                             </p:stCondLst>
                             <p:childTnLst>
                               <p:par>
-                                <p:cTn id="5" presetID="1" presetClass="entr" presetSubtype="0" fill="hold" grpId="0" nodeType="clickEffect">
+                                <p:cTn id="5" presetID="1" presetClass="entr" presetSubtype="0" fill="hold" grpId="0" nodeType="withEffect">
                                   <p:stCondLst>
                                     <p:cond delay="0"/>
                                   </p:stCondLst>
@@ -25372,6 +25445,9 @@
                     <p:cTn id="3" fill="hold">
                       <p:stCondLst>
                         <p:cond delay="indefinite"/>
+                        <p:cond evt="onBegin" delay="0">
+                          <p:tn val="2"/>
+                        </p:cond>
                       </p:stCondLst>
                       <p:childTnLst>
                         <p:par>
@@ -25381,7 +25457,7 @@
                             </p:stCondLst>
                             <p:childTnLst>
                               <p:par>
-                                <p:cTn id="5" presetID="16" presetClass="entr" presetSubtype="21" fill="hold" grpId="0" nodeType="clickEffect">
+                                <p:cTn id="5" presetID="16" presetClass="entr" presetSubtype="21" fill="hold" grpId="0" nodeType="withEffect">
                                   <p:stCondLst>
                                     <p:cond delay="0"/>
                                   </p:stCondLst>
@@ -25423,33 +25499,15 @@
                                   </p:childTnLst>
                                 </p:cTn>
                               </p:par>
-                            </p:childTnLst>
-                          </p:cTn>
-                        </p:par>
-                      </p:childTnLst>
-                    </p:cTn>
-                  </p:par>
-                  <p:par>
-                    <p:cTn id="8" fill="hold">
-                      <p:stCondLst>
-                        <p:cond delay="indefinite"/>
-                      </p:stCondLst>
-                      <p:childTnLst>
-                        <p:par>
-                          <p:cTn id="9" fill="hold">
-                            <p:stCondLst>
-                              <p:cond delay="0"/>
-                            </p:stCondLst>
-                            <p:childTnLst>
                               <p:par>
-                                <p:cTn id="10" presetID="16" presetClass="entr" presetSubtype="21" fill="hold" grpId="0" nodeType="clickEffect">
+                                <p:cTn id="8" presetID="16" presetClass="entr" presetSubtype="21" fill="hold" grpId="0" nodeType="withEffect">
                                   <p:stCondLst>
                                     <p:cond delay="0"/>
                                   </p:stCondLst>
                                   <p:childTnLst>
                                     <p:set>
                                       <p:cBhvr>
-                                        <p:cTn id="11" dur="1" fill="hold">
+                                        <p:cTn id="9" dur="1" fill="hold">
                                           <p:stCondLst>
                                             <p:cond delay="0"/>
                                           </p:stCondLst>
@@ -25471,7 +25529,7 @@
                                     </p:set>
                                     <p:animEffect transition="in" filter="barn(inVertical)">
                                       <p:cBhvr>
-                                        <p:cTn id="12" dur="500"/>
+                                        <p:cTn id="10" dur="500"/>
                                         <p:tgtEl>
                                           <p:spTgt spid="182275">
                                             <p:txEl>
@@ -25484,33 +25542,15 @@
                                   </p:childTnLst>
                                 </p:cTn>
                               </p:par>
-                            </p:childTnLst>
-                          </p:cTn>
-                        </p:par>
-                      </p:childTnLst>
-                    </p:cTn>
-                  </p:par>
-                  <p:par>
-                    <p:cTn id="13" fill="hold">
-                      <p:stCondLst>
-                        <p:cond delay="indefinite"/>
-                      </p:stCondLst>
-                      <p:childTnLst>
-                        <p:par>
-                          <p:cTn id="14" fill="hold">
-                            <p:stCondLst>
-                              <p:cond delay="0"/>
-                            </p:stCondLst>
-                            <p:childTnLst>
                               <p:par>
-                                <p:cTn id="15" presetID="16" presetClass="entr" presetSubtype="21" fill="hold" grpId="0" nodeType="clickEffect">
+                                <p:cTn id="11" presetID="16" presetClass="entr" presetSubtype="21" fill="hold" grpId="0" nodeType="withEffect">
                                   <p:stCondLst>
                                     <p:cond delay="0"/>
                                   </p:stCondLst>
                                   <p:childTnLst>
                                     <p:set>
                                       <p:cBhvr>
-                                        <p:cTn id="16" dur="1" fill="hold">
+                                        <p:cTn id="12" dur="1" fill="hold">
                                           <p:stCondLst>
                                             <p:cond delay="0"/>
                                           </p:stCondLst>
@@ -25532,7 +25572,7 @@
                                     </p:set>
                                     <p:animEffect transition="in" filter="barn(inVertical)">
                                       <p:cBhvr>
-                                        <p:cTn id="17" dur="500"/>
+                                        <p:cTn id="13" dur="500"/>
                                         <p:tgtEl>
                                           <p:spTgt spid="182275">
                                             <p:txEl>
@@ -25573,7 +25613,7 @@
       </p:par>
     </p:tnLst>
     <p:bldLst>
-      <p:bldP spid="182275" grpId="0" build="p"/>
+      <p:bldP spid="182275" grpId="0" uiExpand="1" build="p"/>
     </p:bldLst>
   </p:timing>
 </p:sld>
@@ -26013,6 +26053,9 @@
                     <p:cTn id="3" fill="hold">
                       <p:stCondLst>
                         <p:cond delay="indefinite"/>
+                        <p:cond evt="onBegin" delay="0">
+                          <p:tn val="2"/>
+                        </p:cond>
                       </p:stCondLst>
                       <p:childTnLst>
                         <p:par>
@@ -26022,7 +26065,7 @@
                             </p:stCondLst>
                             <p:childTnLst>
                               <p:par>
-                                <p:cTn id="5" presetID="16" presetClass="entr" presetSubtype="21" fill="hold" grpId="0" nodeType="clickEffect">
+                                <p:cTn id="5" presetID="16" presetClass="entr" presetSubtype="21" fill="hold" grpId="0" nodeType="withEffect">
                                   <p:stCondLst>
                                     <p:cond delay="0"/>
                                   </p:stCondLst>
@@ -26064,33 +26107,15 @@
                                   </p:childTnLst>
                                 </p:cTn>
                               </p:par>
-                            </p:childTnLst>
-                          </p:cTn>
-                        </p:par>
-                      </p:childTnLst>
-                    </p:cTn>
-                  </p:par>
-                  <p:par>
-                    <p:cTn id="8" fill="hold">
-                      <p:stCondLst>
-                        <p:cond delay="indefinite"/>
-                      </p:stCondLst>
-                      <p:childTnLst>
-                        <p:par>
-                          <p:cTn id="9" fill="hold">
-                            <p:stCondLst>
-                              <p:cond delay="0"/>
-                            </p:stCondLst>
-                            <p:childTnLst>
                               <p:par>
-                                <p:cTn id="10" presetID="16" presetClass="entr" presetSubtype="21" fill="hold" grpId="0" nodeType="clickEffect">
+                                <p:cTn id="8" presetID="16" presetClass="entr" presetSubtype="21" fill="hold" grpId="0" nodeType="withEffect">
                                   <p:stCondLst>
                                     <p:cond delay="0"/>
                                   </p:stCondLst>
                                   <p:childTnLst>
                                     <p:set>
                                       <p:cBhvr>
-                                        <p:cTn id="11" dur="1" fill="hold">
+                                        <p:cTn id="9" dur="1" fill="hold">
                                           <p:stCondLst>
                                             <p:cond delay="0"/>
                                           </p:stCondLst>
@@ -26112,7 +26137,7 @@
                                     </p:set>
                                     <p:animEffect transition="in" filter="barn(inVertical)">
                                       <p:cBhvr>
-                                        <p:cTn id="12" dur="500"/>
+                                        <p:cTn id="10" dur="500"/>
                                         <p:tgtEl>
                                           <p:spTgt spid="182275">
                                             <p:txEl>
@@ -26125,33 +26150,15 @@
                                   </p:childTnLst>
                                 </p:cTn>
                               </p:par>
-                            </p:childTnLst>
-                          </p:cTn>
-                        </p:par>
-                      </p:childTnLst>
-                    </p:cTn>
-                  </p:par>
-                  <p:par>
-                    <p:cTn id="13" fill="hold">
-                      <p:stCondLst>
-                        <p:cond delay="indefinite"/>
-                      </p:stCondLst>
-                      <p:childTnLst>
-                        <p:par>
-                          <p:cTn id="14" fill="hold">
-                            <p:stCondLst>
-                              <p:cond delay="0"/>
-                            </p:stCondLst>
-                            <p:childTnLst>
                               <p:par>
-                                <p:cTn id="15" presetID="16" presetClass="entr" presetSubtype="21" fill="hold" grpId="0" nodeType="clickEffect">
+                                <p:cTn id="11" presetID="16" presetClass="entr" presetSubtype="21" fill="hold" grpId="0" nodeType="withEffect">
                                   <p:stCondLst>
                                     <p:cond delay="0"/>
                                   </p:stCondLst>
                                   <p:childTnLst>
                                     <p:set>
                                       <p:cBhvr>
-                                        <p:cTn id="16" dur="1" fill="hold">
+                                        <p:cTn id="12" dur="1" fill="hold">
                                           <p:stCondLst>
                                             <p:cond delay="0"/>
                                           </p:stCondLst>
@@ -26173,7 +26180,7 @@
                                     </p:set>
                                     <p:animEffect transition="in" filter="barn(inVertical)">
                                       <p:cBhvr>
-                                        <p:cTn id="17" dur="500"/>
+                                        <p:cTn id="13" dur="500"/>
                                         <p:tgtEl>
                                           <p:spTgt spid="182275">
                                             <p:txEl>
@@ -26214,7 +26221,7 @@
       </p:par>
     </p:tnLst>
     <p:bldLst>
-      <p:bldP spid="182275" grpId="0" build="p"/>
+      <p:bldP spid="182275" grpId="0" uiExpand="1" build="p"/>
     </p:bldLst>
   </p:timing>
 </p:sld>
@@ -26419,8 +26426,8 @@
         </p:nvSpPr>
         <p:spPr bwMode="auto">
           <a:xfrm>
-            <a:off x="539552" y="2009483"/>
-            <a:ext cx="8209885" cy="1944216"/>
+            <a:off x="1259632" y="2009483"/>
+            <a:ext cx="7489805" cy="1944216"/>
           </a:xfrm>
           <a:prstGeom prst="rect">
             <a:avLst/>
@@ -26724,7 +26731,7 @@
         </p:nvCxnSpPr>
         <p:spPr>
           <a:xfrm>
-            <a:off x="323528" y="2139702"/>
+            <a:off x="1166767" y="2026277"/>
             <a:ext cx="360527" cy="432048"/>
           </a:xfrm>
           <a:prstGeom prst="straightConnector1">
@@ -26763,7 +26770,7 @@
         </p:nvSpPr>
         <p:spPr>
           <a:xfrm>
-            <a:off x="71987" y="1616482"/>
+            <a:off x="915226" y="1480315"/>
             <a:ext cx="1224136" cy="523220"/>
           </a:xfrm>
           <a:prstGeom prst="rect">
@@ -26808,13 +26815,12 @@
           </p:cNvPr>
           <p:cNvCxnSpPr>
             <a:cxnSpLocks/>
-            <a:stCxn id="18" idx="2"/>
           </p:cNvCxnSpPr>
           <p:nvPr/>
         </p:nvCxnSpPr>
         <p:spPr>
           <a:xfrm flipH="1">
-            <a:off x="1606037" y="1948181"/>
+            <a:off x="2386656" y="1878092"/>
             <a:ext cx="136695" cy="604405"/>
           </a:xfrm>
           <a:prstGeom prst="straightConnector1">
@@ -26853,7 +26859,7 @@
         </p:nvSpPr>
         <p:spPr>
           <a:xfrm>
-            <a:off x="993969" y="1640404"/>
+            <a:off x="1758466" y="1601637"/>
             <a:ext cx="1497526" cy="307777"/>
           </a:xfrm>
           <a:prstGeom prst="rect">
@@ -26894,7 +26900,7 @@
         </p:nvCxnSpPr>
         <p:spPr>
           <a:xfrm flipH="1">
-            <a:off x="2339752" y="1491630"/>
+            <a:off x="3067072" y="1491630"/>
             <a:ext cx="324962" cy="1008112"/>
           </a:xfrm>
           <a:prstGeom prst="straightConnector1">
@@ -26933,7 +26939,7 @@
         </p:nvSpPr>
         <p:spPr>
           <a:xfrm>
-            <a:off x="2123728" y="1013996"/>
+            <a:off x="2887491" y="970860"/>
             <a:ext cx="1440160" cy="523220"/>
           </a:xfrm>
           <a:prstGeom prst="rect">
@@ -26974,7 +26980,7 @@
         </p:nvCxnSpPr>
         <p:spPr>
           <a:xfrm flipH="1">
-            <a:off x="2915816" y="1616482"/>
+            <a:off x="3535124" y="1518052"/>
             <a:ext cx="792527" cy="955268"/>
           </a:xfrm>
           <a:prstGeom prst="straightConnector1">
@@ -27013,7 +27019,7 @@
         </p:nvSpPr>
         <p:spPr>
           <a:xfrm>
-            <a:off x="3483212" y="1128403"/>
+            <a:off x="3950298" y="1099447"/>
             <a:ext cx="1295657" cy="523220"/>
           </a:xfrm>
           <a:prstGeom prst="rect">
@@ -27087,8 +27093,8 @@
         </p:nvSpPr>
         <p:spPr bwMode="auto">
           <a:xfrm>
-            <a:off x="-36512" y="987574"/>
-            <a:ext cx="9144000" cy="3672408"/>
+            <a:off x="899592" y="987574"/>
+            <a:ext cx="8207896" cy="3672408"/>
           </a:xfrm>
           <a:prstGeom prst="rect">
             <a:avLst/>
@@ -27223,7 +27229,7 @@
               <a:rPr lang="pt-BR" altLang="pt-BR" sz="2000" dirty="0">
                 <a:ea typeface="Arial Unicode MS" pitchFamily="34" charset="-128"/>
               </a:rPr>
-              <a:t>Ex31:</a:t>
+              <a:t>Exemplo:</a:t>
             </a:r>
           </a:p>
           <a:p>
@@ -27486,8 +27492,8 @@
         </p:nvSpPr>
         <p:spPr bwMode="auto">
           <a:xfrm>
-            <a:off x="35496" y="1635646"/>
-            <a:ext cx="8784976" cy="1512168"/>
+            <a:off x="971600" y="1635646"/>
+            <a:ext cx="7848872" cy="1512168"/>
           </a:xfrm>
           <a:prstGeom prst="rect">
             <a:avLst/>
@@ -27875,8 +27881,8 @@
         </p:nvSpPr>
         <p:spPr bwMode="auto">
           <a:xfrm>
-            <a:off x="35496" y="771550"/>
-            <a:ext cx="8784976" cy="3888432"/>
+            <a:off x="827584" y="771550"/>
+            <a:ext cx="7992888" cy="3888432"/>
           </a:xfrm>
           <a:prstGeom prst="rect">
             <a:avLst/>
@@ -28405,8 +28411,8 @@
         </p:nvSpPr>
         <p:spPr bwMode="auto">
           <a:xfrm>
-            <a:off x="-36512" y="987574"/>
-            <a:ext cx="9144000" cy="3672408"/>
+            <a:off x="971600" y="987574"/>
+            <a:ext cx="7632848" cy="3672408"/>
           </a:xfrm>
           <a:prstGeom prst="rect">
             <a:avLst/>
